--- a/20_Projects/海音_心体の調律/タマラ/川越さん/20261014_セッション資料_エネルギーとチャクラ.pptx
+++ b/20_Projects/海音_心体の調律/タマラ/川越さん/20261014_セッション資料_エネルギーとチャクラ.pptx
@@ -16,6 +16,7 @@
     <p:sldId id="264" r:id="rId15"/>
     <p:sldId id="265" r:id="rId16"/>
     <p:sldId id="266" r:id="rId17"/>
+    <p:sldId id="267" r:id="rId18"/>
   </p:sldIdLst>
   <p:sldSz cx="12191695" cy="6858000" type="screen4x3"/>
   <p:notesSz cx="6858000" cy="9144000"/>
@@ -3644,7 +3645,7 @@
                 </a:solidFill>
                 <a:latin typeface="Meiryo UI"/>
               </a:rPr>
-              <a:t>チャクラを育てるやり方</a:t>
+              <a:t>第4〜第7チャクラ</a:t>
             </a:r>
           </a:p>
         </p:txBody>
@@ -3683,27 +3684,27 @@
                 </a:solidFill>
                 <a:latin typeface="Meiryo UI"/>
               </a:rPr>
-              <a:t>一つずつ、順番に活性化していきます</a:t>
-            </a:r>
-          </a:p>
-        </p:txBody>
-      </p:sp>
-      <p:sp>
-        <p:nvSpPr>
-          <p:cNvPr id="4" name="Oval 3"/>
+              <a:t>体の上の4つ＝心・表現・直感・つながり（一般的な考え方）</a:t>
+            </a:r>
+          </a:p>
+        </p:txBody>
+      </p:sp>
+      <p:sp>
+        <p:nvSpPr>
+          <p:cNvPr id="4" name="Rounded Rectangle 3"/>
           <p:cNvSpPr/>
           <p:nvPr/>
         </p:nvSpPr>
         <p:spPr>
           <a:xfrm>
-            <a:off x="548640" y="1828800"/>
-            <a:ext cx="914400" cy="914400"/>
-          </a:xfrm>
-          <a:prstGeom prst="ellipse">
+            <a:off x="548640" y="1737360"/>
+            <a:ext cx="2606040" cy="4572000"/>
+          </a:xfrm>
+          <a:prstGeom prst="roundRect">
             <a:avLst/>
           </a:prstGeom>
           <a:solidFill>
-            <a:srgbClr val="C9973A"/>
+            <a:srgbClr val="F4F1FA"/>
           </a:solidFill>
           <a:ln>
             <a:noFill/>
@@ -3725,32 +3726,154 @@
           </a:fontRef>
         </p:style>
         <p:txBody>
+          <a:bodyPr rtlCol="0" anchor="ctr"/>
+          <a:lstStyle/>
+          <a:p>
+            <a:pPr algn="ctr"/>
+          </a:p>
+        </p:txBody>
+      </p:sp>
+      <p:sp>
+        <p:nvSpPr>
+          <p:cNvPr id="5" name="Oval 4"/>
+          <p:cNvSpPr/>
+          <p:nvPr/>
+        </p:nvSpPr>
+        <p:spPr>
+          <a:xfrm>
+            <a:off x="1371600" y="1965960"/>
+            <a:ext cx="960120" cy="960120"/>
+          </a:xfrm>
+          <a:prstGeom prst="ellipse">
+            <a:avLst/>
+          </a:prstGeom>
+          <a:solidFill>
+            <a:srgbClr val="4FA95A"/>
+          </a:solidFill>
+          <a:ln>
+            <a:noFill/>
+          </a:ln>
+          <a:effectLst/>
+        </p:spPr>
+        <p:style>
+          <a:lnRef idx="1">
+            <a:schemeClr val="accent1"/>
+          </a:lnRef>
+          <a:fillRef idx="3">
+            <a:schemeClr val="accent1"/>
+          </a:fillRef>
+          <a:effectRef idx="2">
+            <a:schemeClr val="accent1"/>
+          </a:effectRef>
+          <a:fontRef idx="minor">
+            <a:schemeClr val="lt1"/>
+          </a:fontRef>
+        </p:style>
+        <p:txBody>
           <a:bodyPr rtlCol="0" anchor="ctr" wrap="square" lIns="45720" rIns="45720"/>
           <a:lstStyle/>
           <a:p>
             <a:pPr algn="ctr"/>
             <a:r>
-              <a:rPr sz="2600" b="1">
+              <a:rPr sz="2800" b="1">
                 <a:solidFill>
                   <a:srgbClr val="FFFFFF"/>
                 </a:solidFill>
                 <a:latin typeface="Meiryo UI"/>
               </a:rPr>
-              <a:t>①</a:t>
-            </a:r>
-          </a:p>
-        </p:txBody>
-      </p:sp>
-      <p:sp>
-        <p:nvSpPr>
-          <p:cNvPr id="5" name="TextBox 4"/>
+              <a:t>4</a:t>
+            </a:r>
+          </a:p>
+        </p:txBody>
+      </p:sp>
+      <p:sp>
+        <p:nvSpPr>
+          <p:cNvPr id="6" name="TextBox 5"/>
           <p:cNvSpPr txBox="1"/>
           <p:nvPr/>
         </p:nvSpPr>
         <p:spPr>
           <a:xfrm>
-            <a:off x="1645919" y="1691640"/>
-            <a:ext cx="4389120" cy="457200"/>
+            <a:off x="640080" y="3108960"/>
+            <a:ext cx="2423160" cy="548640"/>
+          </a:xfrm>
+          <a:prstGeom prst="rect">
+            <a:avLst/>
+          </a:prstGeom>
+          <a:noFill/>
+        </p:spPr>
+        <p:txBody>
+          <a:bodyPr wrap="square" anchor="t" lIns="45720" rIns="45720">
+            <a:spAutoFit/>
+          </a:bodyPr>
+          <a:lstStyle/>
+          <a:p>
+            <a:pPr algn="ctr">
+              <a:spcAft>
+                <a:spcPts val="600"/>
+              </a:spcAft>
+            </a:pPr>
+            <a:r>
+              <a:rPr sz="2400" b="1">
+                <a:solidFill>
+                  <a:srgbClr val="2B2350"/>
+                </a:solidFill>
+                <a:latin typeface="Meiryo UI"/>
+              </a:rPr>
+              <a:t>第4チャクラ</a:t>
+            </a:r>
+          </a:p>
+        </p:txBody>
+      </p:sp>
+      <p:sp>
+        <p:nvSpPr>
+          <p:cNvPr id="7" name="TextBox 6"/>
+          <p:cNvSpPr txBox="1"/>
+          <p:nvPr/>
+        </p:nvSpPr>
+        <p:spPr>
+          <a:xfrm>
+            <a:off x="640080" y="3657600"/>
+            <a:ext cx="2423160" cy="457200"/>
+          </a:xfrm>
+          <a:prstGeom prst="rect">
+            <a:avLst/>
+          </a:prstGeom>
+          <a:noFill/>
+        </p:spPr>
+        <p:txBody>
+          <a:bodyPr wrap="square" anchor="t" lIns="45720" rIns="45720">
+            <a:spAutoFit/>
+          </a:bodyPr>
+          <a:lstStyle/>
+          <a:p>
+            <a:pPr algn="ctr">
+              <a:spcAft>
+                <a:spcPts val="600"/>
+              </a:spcAft>
+            </a:pPr>
+            <a:r>
+              <a:rPr sz="1800" b="0">
+                <a:solidFill>
+                  <a:srgbClr val="666666"/>
+                </a:solidFill>
+                <a:latin typeface="Meiryo UI"/>
+              </a:rPr>
+              <a:t>胸のまんなか</a:t>
+            </a:r>
+          </a:p>
+        </p:txBody>
+      </p:sp>
+      <p:sp>
+        <p:nvSpPr>
+          <p:cNvPr id="8" name="TextBox 7"/>
+          <p:cNvSpPr txBox="1"/>
+          <p:nvPr/>
+        </p:nvSpPr>
+        <p:spPr>
+          <a:xfrm>
+            <a:off x="777240" y="4297680"/>
+            <a:ext cx="2286000" cy="1828800"/>
           </a:xfrm>
           <a:prstGeom prst="rect">
             <a:avLst/>
@@ -3769,38 +3892,15 @@
               </a:spcAft>
             </a:pPr>
             <a:r>
-              <a:rPr sz="2200" b="1">
-                <a:solidFill>
-                  <a:srgbClr val="2B2350"/>
-                </a:solidFill>
-                <a:latin typeface="Meiryo UI"/>
-              </a:rPr>
-              <a:t>光の手</a:t>
-            </a:r>
-          </a:p>
-        </p:txBody>
-      </p:sp>
-      <p:sp>
-        <p:nvSpPr>
-          <p:cNvPr id="6" name="TextBox 5"/>
-          <p:cNvSpPr txBox="1"/>
-          <p:nvPr/>
-        </p:nvSpPr>
-        <p:spPr>
-          <a:xfrm>
-            <a:off x="1645919" y="2148840"/>
-            <a:ext cx="4389120" cy="1005840"/>
-          </a:xfrm>
-          <a:prstGeom prst="rect">
-            <a:avLst/>
-          </a:prstGeom>
-          <a:noFill/>
-        </p:spPr>
-        <p:txBody>
-          <a:bodyPr wrap="square" anchor="t" lIns="45720" rIns="45720">
-            <a:spAutoFit/>
-          </a:bodyPr>
-          <a:lstStyle/>
+              <a:rPr sz="1900" b="0">
+                <a:solidFill>
+                  <a:srgbClr val="2A2A2A"/>
+                </a:solidFill>
+                <a:latin typeface="Meiryo UI"/>
+              </a:rPr>
+              <a:t>・愛・思いやり</a:t>
+            </a:r>
+          </a:p>
           <a:p>
             <a:pPr algn="l">
               <a:spcAft>
@@ -3808,33 +3908,33 @@
               </a:spcAft>
             </a:pPr>
             <a:r>
-              <a:rPr sz="1700" b="0">
+              <a:rPr sz="1900" b="0">
                 <a:solidFill>
                   <a:srgbClr val="2A2A2A"/>
                 </a:solidFill>
                 <a:latin typeface="Meiryo UI"/>
               </a:rPr>
-              <a:t>手にタマラをコーティングして「光の手」に変える</a:t>
-            </a:r>
-          </a:p>
-        </p:txBody>
-      </p:sp>
-      <p:sp>
-        <p:nvSpPr>
-          <p:cNvPr id="7" name="Oval 6"/>
+              <a:t>・心臓・肺・呼吸</a:t>
+            </a:r>
+          </a:p>
+        </p:txBody>
+      </p:sp>
+      <p:sp>
+        <p:nvSpPr>
+          <p:cNvPr id="9" name="Rounded Rectangle 8"/>
           <p:cNvSpPr/>
           <p:nvPr/>
         </p:nvSpPr>
         <p:spPr>
           <a:xfrm>
-            <a:off x="548640" y="3429000"/>
-            <a:ext cx="914400" cy="914400"/>
-          </a:xfrm>
-          <a:prstGeom prst="ellipse">
+            <a:off x="3383280" y="1737360"/>
+            <a:ext cx="2606040" cy="4572000"/>
+          </a:xfrm>
+          <a:prstGeom prst="roundRect">
             <a:avLst/>
           </a:prstGeom>
           <a:solidFill>
-            <a:srgbClr val="C9973A"/>
+            <a:srgbClr val="F4F1FA"/>
           </a:solidFill>
           <a:ln>
             <a:noFill/>
@@ -3856,32 +3956,154 @@
           </a:fontRef>
         </p:style>
         <p:txBody>
+          <a:bodyPr rtlCol="0" anchor="ctr"/>
+          <a:lstStyle/>
+          <a:p>
+            <a:pPr algn="ctr"/>
+          </a:p>
+        </p:txBody>
+      </p:sp>
+      <p:sp>
+        <p:nvSpPr>
+          <p:cNvPr id="10" name="Oval 9"/>
+          <p:cNvSpPr/>
+          <p:nvPr/>
+        </p:nvSpPr>
+        <p:spPr>
+          <a:xfrm>
+            <a:off x="4206240" y="1965960"/>
+            <a:ext cx="960120" cy="960120"/>
+          </a:xfrm>
+          <a:prstGeom prst="ellipse">
+            <a:avLst/>
+          </a:prstGeom>
+          <a:solidFill>
+            <a:srgbClr val="3D8FD1"/>
+          </a:solidFill>
+          <a:ln>
+            <a:noFill/>
+          </a:ln>
+          <a:effectLst/>
+        </p:spPr>
+        <p:style>
+          <a:lnRef idx="1">
+            <a:schemeClr val="accent1"/>
+          </a:lnRef>
+          <a:fillRef idx="3">
+            <a:schemeClr val="accent1"/>
+          </a:fillRef>
+          <a:effectRef idx="2">
+            <a:schemeClr val="accent1"/>
+          </a:effectRef>
+          <a:fontRef idx="minor">
+            <a:schemeClr val="lt1"/>
+          </a:fontRef>
+        </p:style>
+        <p:txBody>
           <a:bodyPr rtlCol="0" anchor="ctr" wrap="square" lIns="45720" rIns="45720"/>
           <a:lstStyle/>
           <a:p>
             <a:pPr algn="ctr"/>
             <a:r>
-              <a:rPr sz="2600" b="1">
+              <a:rPr sz="2800" b="1">
                 <a:solidFill>
                   <a:srgbClr val="FFFFFF"/>
                 </a:solidFill>
                 <a:latin typeface="Meiryo UI"/>
               </a:rPr>
-              <a:t>②</a:t>
-            </a:r>
-          </a:p>
-        </p:txBody>
-      </p:sp>
-      <p:sp>
-        <p:nvSpPr>
-          <p:cNvPr id="8" name="TextBox 7"/>
+              <a:t>5</a:t>
+            </a:r>
+          </a:p>
+        </p:txBody>
+      </p:sp>
+      <p:sp>
+        <p:nvSpPr>
+          <p:cNvPr id="11" name="TextBox 10"/>
           <p:cNvSpPr txBox="1"/>
           <p:nvPr/>
         </p:nvSpPr>
         <p:spPr>
           <a:xfrm>
-            <a:off x="1645919" y="3291840"/>
-            <a:ext cx="4389120" cy="457200"/>
+            <a:off x="3474720" y="3108960"/>
+            <a:ext cx="2423160" cy="548640"/>
+          </a:xfrm>
+          <a:prstGeom prst="rect">
+            <a:avLst/>
+          </a:prstGeom>
+          <a:noFill/>
+        </p:spPr>
+        <p:txBody>
+          <a:bodyPr wrap="square" anchor="t" lIns="45720" rIns="45720">
+            <a:spAutoFit/>
+          </a:bodyPr>
+          <a:lstStyle/>
+          <a:p>
+            <a:pPr algn="ctr">
+              <a:spcAft>
+                <a:spcPts val="600"/>
+              </a:spcAft>
+            </a:pPr>
+            <a:r>
+              <a:rPr sz="2400" b="1">
+                <a:solidFill>
+                  <a:srgbClr val="2B2350"/>
+                </a:solidFill>
+                <a:latin typeface="Meiryo UI"/>
+              </a:rPr>
+              <a:t>第5チャクラ</a:t>
+            </a:r>
+          </a:p>
+        </p:txBody>
+      </p:sp>
+      <p:sp>
+        <p:nvSpPr>
+          <p:cNvPr id="12" name="TextBox 11"/>
+          <p:cNvSpPr txBox="1"/>
+          <p:nvPr/>
+        </p:nvSpPr>
+        <p:spPr>
+          <a:xfrm>
+            <a:off x="3474720" y="3657600"/>
+            <a:ext cx="2423160" cy="457200"/>
+          </a:xfrm>
+          <a:prstGeom prst="rect">
+            <a:avLst/>
+          </a:prstGeom>
+          <a:noFill/>
+        </p:spPr>
+        <p:txBody>
+          <a:bodyPr wrap="square" anchor="t" lIns="45720" rIns="45720">
+            <a:spAutoFit/>
+          </a:bodyPr>
+          <a:lstStyle/>
+          <a:p>
+            <a:pPr algn="ctr">
+              <a:spcAft>
+                <a:spcPts val="600"/>
+              </a:spcAft>
+            </a:pPr>
+            <a:r>
+              <a:rPr sz="1800" b="0">
+                <a:solidFill>
+                  <a:srgbClr val="666666"/>
+                </a:solidFill>
+                <a:latin typeface="Meiryo UI"/>
+              </a:rPr>
+              <a:t>のど</a:t>
+            </a:r>
+          </a:p>
+        </p:txBody>
+      </p:sp>
+      <p:sp>
+        <p:nvSpPr>
+          <p:cNvPr id="13" name="TextBox 12"/>
+          <p:cNvSpPr txBox="1"/>
+          <p:nvPr/>
+        </p:nvSpPr>
+        <p:spPr>
+          <a:xfrm>
+            <a:off x="3611880" y="4297680"/>
+            <a:ext cx="2286000" cy="1828800"/>
           </a:xfrm>
           <a:prstGeom prst="rect">
             <a:avLst/>
@@ -3900,38 +4122,15 @@
               </a:spcAft>
             </a:pPr>
             <a:r>
-              <a:rPr sz="2200" b="1">
-                <a:solidFill>
-                  <a:srgbClr val="2B2350"/>
-                </a:solidFill>
-                <a:latin typeface="Meiryo UI"/>
-              </a:rPr>
-              <a:t>取り出す</a:t>
-            </a:r>
-          </a:p>
-        </p:txBody>
-      </p:sp>
-      <p:sp>
-        <p:nvSpPr>
-          <p:cNvPr id="9" name="TextBox 8"/>
-          <p:cNvSpPr txBox="1"/>
-          <p:nvPr/>
-        </p:nvSpPr>
-        <p:spPr>
-          <a:xfrm>
-            <a:off x="1645919" y="3749039"/>
-            <a:ext cx="4389120" cy="1005840"/>
-          </a:xfrm>
-          <a:prstGeom prst="rect">
-            <a:avLst/>
-          </a:prstGeom>
-          <a:noFill/>
-        </p:spPr>
-        <p:txBody>
-          <a:bodyPr wrap="square" anchor="t" lIns="45720" rIns="45720">
-            <a:spAutoFit/>
-          </a:bodyPr>
-          <a:lstStyle/>
+              <a:rPr sz="1900" b="0">
+                <a:solidFill>
+                  <a:srgbClr val="2A2A2A"/>
+                </a:solidFill>
+                <a:latin typeface="Meiryo UI"/>
+              </a:rPr>
+              <a:t>・伝える・表現する</a:t>
+            </a:r>
+          </a:p>
           <a:p>
             <a:pPr algn="l">
               <a:spcAft>
@@ -3939,33 +4138,33 @@
               </a:spcAft>
             </a:pPr>
             <a:r>
-              <a:rPr sz="1700" b="0">
+              <a:rPr sz="1900" b="0">
                 <a:solidFill>
                   <a:srgbClr val="2A2A2A"/>
                 </a:solidFill>
                 <a:latin typeface="Meiryo UI"/>
               </a:rPr>
-              <a:t>チャクラに向かって「チャクラさん、教えてください」と声をかけ、手の上に取り出す</a:t>
-            </a:r>
-          </a:p>
-        </p:txBody>
-      </p:sp>
-      <p:sp>
-        <p:nvSpPr>
-          <p:cNvPr id="10" name="Oval 9"/>
+              <a:t>・のど・声</a:t>
+            </a:r>
+          </a:p>
+        </p:txBody>
+      </p:sp>
+      <p:sp>
+        <p:nvSpPr>
+          <p:cNvPr id="14" name="Rounded Rectangle 13"/>
           <p:cNvSpPr/>
           <p:nvPr/>
         </p:nvSpPr>
         <p:spPr>
           <a:xfrm>
-            <a:off x="548640" y="5029200"/>
-            <a:ext cx="914400" cy="914400"/>
-          </a:xfrm>
-          <a:prstGeom prst="ellipse">
+            <a:off x="6217920" y="1737360"/>
+            <a:ext cx="2606040" cy="4572000"/>
+          </a:xfrm>
+          <a:prstGeom prst="roundRect">
             <a:avLst/>
           </a:prstGeom>
           <a:solidFill>
-            <a:srgbClr val="C9973A"/>
+            <a:srgbClr val="F4F1FA"/>
           </a:solidFill>
           <a:ln>
             <a:noFill/>
@@ -3987,32 +4186,154 @@
           </a:fontRef>
         </p:style>
         <p:txBody>
+          <a:bodyPr rtlCol="0" anchor="ctr"/>
+          <a:lstStyle/>
+          <a:p>
+            <a:pPr algn="ctr"/>
+          </a:p>
+        </p:txBody>
+      </p:sp>
+      <p:sp>
+        <p:nvSpPr>
+          <p:cNvPr id="15" name="Oval 14"/>
+          <p:cNvSpPr/>
+          <p:nvPr/>
+        </p:nvSpPr>
+        <p:spPr>
+          <a:xfrm>
+            <a:off x="7040880" y="1965960"/>
+            <a:ext cx="960120" cy="960120"/>
+          </a:xfrm>
+          <a:prstGeom prst="ellipse">
+            <a:avLst/>
+          </a:prstGeom>
+          <a:solidFill>
+            <a:srgbClr val="4B4FB0"/>
+          </a:solidFill>
+          <a:ln>
+            <a:noFill/>
+          </a:ln>
+          <a:effectLst/>
+        </p:spPr>
+        <p:style>
+          <a:lnRef idx="1">
+            <a:schemeClr val="accent1"/>
+          </a:lnRef>
+          <a:fillRef idx="3">
+            <a:schemeClr val="accent1"/>
+          </a:fillRef>
+          <a:effectRef idx="2">
+            <a:schemeClr val="accent1"/>
+          </a:effectRef>
+          <a:fontRef idx="minor">
+            <a:schemeClr val="lt1"/>
+          </a:fontRef>
+        </p:style>
+        <p:txBody>
           <a:bodyPr rtlCol="0" anchor="ctr" wrap="square" lIns="45720" rIns="45720"/>
           <a:lstStyle/>
           <a:p>
             <a:pPr algn="ctr"/>
             <a:r>
-              <a:rPr sz="2600" b="1">
+              <a:rPr sz="2800" b="1">
                 <a:solidFill>
                   <a:srgbClr val="FFFFFF"/>
                 </a:solidFill>
                 <a:latin typeface="Meiryo UI"/>
               </a:rPr>
-              <a:t>③</a:t>
-            </a:r>
-          </a:p>
-        </p:txBody>
-      </p:sp>
-      <p:sp>
-        <p:nvSpPr>
-          <p:cNvPr id="11" name="TextBox 10"/>
+              <a:t>6</a:t>
+            </a:r>
+          </a:p>
+        </p:txBody>
+      </p:sp>
+      <p:sp>
+        <p:nvSpPr>
+          <p:cNvPr id="16" name="TextBox 15"/>
           <p:cNvSpPr txBox="1"/>
           <p:nvPr/>
         </p:nvSpPr>
         <p:spPr>
           <a:xfrm>
-            <a:off x="1645919" y="4892040"/>
-            <a:ext cx="4389120" cy="457200"/>
+            <a:off x="6309359" y="3108960"/>
+            <a:ext cx="2423160" cy="548640"/>
+          </a:xfrm>
+          <a:prstGeom prst="rect">
+            <a:avLst/>
+          </a:prstGeom>
+          <a:noFill/>
+        </p:spPr>
+        <p:txBody>
+          <a:bodyPr wrap="square" anchor="t" lIns="45720" rIns="45720">
+            <a:spAutoFit/>
+          </a:bodyPr>
+          <a:lstStyle/>
+          <a:p>
+            <a:pPr algn="ctr">
+              <a:spcAft>
+                <a:spcPts val="600"/>
+              </a:spcAft>
+            </a:pPr>
+            <a:r>
+              <a:rPr sz="2400" b="1">
+                <a:solidFill>
+                  <a:srgbClr val="2B2350"/>
+                </a:solidFill>
+                <a:latin typeface="Meiryo UI"/>
+              </a:rPr>
+              <a:t>第6チャクラ</a:t>
+            </a:r>
+          </a:p>
+        </p:txBody>
+      </p:sp>
+      <p:sp>
+        <p:nvSpPr>
+          <p:cNvPr id="17" name="TextBox 16"/>
+          <p:cNvSpPr txBox="1"/>
+          <p:nvPr/>
+        </p:nvSpPr>
+        <p:spPr>
+          <a:xfrm>
+            <a:off x="6309359" y="3657600"/>
+            <a:ext cx="2423160" cy="457200"/>
+          </a:xfrm>
+          <a:prstGeom prst="rect">
+            <a:avLst/>
+          </a:prstGeom>
+          <a:noFill/>
+        </p:spPr>
+        <p:txBody>
+          <a:bodyPr wrap="square" anchor="t" lIns="45720" rIns="45720">
+            <a:spAutoFit/>
+          </a:bodyPr>
+          <a:lstStyle/>
+          <a:p>
+            <a:pPr algn="ctr">
+              <a:spcAft>
+                <a:spcPts val="600"/>
+              </a:spcAft>
+            </a:pPr>
+            <a:r>
+              <a:rPr sz="1800" b="0">
+                <a:solidFill>
+                  <a:srgbClr val="666666"/>
+                </a:solidFill>
+                <a:latin typeface="Meiryo UI"/>
+              </a:rPr>
+              <a:t>眉間</a:t>
+            </a:r>
+          </a:p>
+        </p:txBody>
+      </p:sp>
+      <p:sp>
+        <p:nvSpPr>
+          <p:cNvPr id="18" name="TextBox 17"/>
+          <p:cNvSpPr txBox="1"/>
+          <p:nvPr/>
+        </p:nvSpPr>
+        <p:spPr>
+          <a:xfrm>
+            <a:off x="6446520" y="4297680"/>
+            <a:ext cx="2286000" cy="1828800"/>
           </a:xfrm>
           <a:prstGeom prst="rect">
             <a:avLst/>
@@ -4031,38 +4352,15 @@
               </a:spcAft>
             </a:pPr>
             <a:r>
-              <a:rPr sz="2200" b="1">
-                <a:solidFill>
-                  <a:srgbClr val="2B2350"/>
-                </a:solidFill>
-                <a:latin typeface="Meiryo UI"/>
-              </a:rPr>
-              <a:t>形を見る</a:t>
-            </a:r>
-          </a:p>
-        </p:txBody>
-      </p:sp>
-      <p:sp>
-        <p:nvSpPr>
-          <p:cNvPr id="12" name="TextBox 11"/>
-          <p:cNvSpPr txBox="1"/>
-          <p:nvPr/>
-        </p:nvSpPr>
-        <p:spPr>
-          <a:xfrm>
-            <a:off x="1645919" y="5349240"/>
-            <a:ext cx="4389120" cy="1005840"/>
-          </a:xfrm>
-          <a:prstGeom prst="rect">
-            <a:avLst/>
-          </a:prstGeom>
-          <a:noFill/>
-        </p:spPr>
-        <p:txBody>
-          <a:bodyPr wrap="square" anchor="t" lIns="45720" rIns="45720">
-            <a:spAutoFit/>
-          </a:bodyPr>
-          <a:lstStyle/>
+              <a:rPr sz="1900" b="0">
+                <a:solidFill>
+                  <a:srgbClr val="2A2A2A"/>
+                </a:solidFill>
+                <a:latin typeface="Meiryo UI"/>
+              </a:rPr>
+              <a:t>・直感・見通す力</a:t>
+            </a:r>
+          </a:p>
           <a:p>
             <a:pPr algn="l">
               <a:spcAft>
@@ -4070,33 +4368,33 @@
               </a:spcAft>
             </a:pPr>
             <a:r>
-              <a:rPr sz="1700" b="0">
+              <a:rPr sz="1900" b="0">
                 <a:solidFill>
                   <a:srgbClr val="2A2A2A"/>
                 </a:solidFill>
                 <a:latin typeface="Meiryo UI"/>
               </a:rPr>
-              <a:t>チャクラがどんな形か想像する（人によっても、チャクラによっても違います）</a:t>
-            </a:r>
-          </a:p>
-        </p:txBody>
-      </p:sp>
-      <p:sp>
-        <p:nvSpPr>
-          <p:cNvPr id="13" name="Oval 12"/>
+              <a:t>・目・頭</a:t>
+            </a:r>
+          </a:p>
+        </p:txBody>
+      </p:sp>
+      <p:sp>
+        <p:nvSpPr>
+          <p:cNvPr id="19" name="Rounded Rectangle 18"/>
           <p:cNvSpPr/>
           <p:nvPr/>
         </p:nvSpPr>
         <p:spPr>
           <a:xfrm>
-            <a:off x="6217920" y="1828800"/>
-            <a:ext cx="914400" cy="914400"/>
-          </a:xfrm>
-          <a:prstGeom prst="ellipse">
+            <a:off x="9052560" y="1737360"/>
+            <a:ext cx="2606040" cy="4572000"/>
+          </a:xfrm>
+          <a:prstGeom prst="roundRect">
             <a:avLst/>
           </a:prstGeom>
           <a:solidFill>
-            <a:srgbClr val="C9973A"/>
+            <a:srgbClr val="F4F1FA"/>
           </a:solidFill>
           <a:ln>
             <a:noFill/>
@@ -4118,32 +4416,154 @@
           </a:fontRef>
         </p:style>
         <p:txBody>
+          <a:bodyPr rtlCol="0" anchor="ctr"/>
+          <a:lstStyle/>
+          <a:p>
+            <a:pPr algn="ctr"/>
+          </a:p>
+        </p:txBody>
+      </p:sp>
+      <p:sp>
+        <p:nvSpPr>
+          <p:cNvPr id="20" name="Oval 19"/>
+          <p:cNvSpPr/>
+          <p:nvPr/>
+        </p:nvSpPr>
+        <p:spPr>
+          <a:xfrm>
+            <a:off x="9875520" y="1965960"/>
+            <a:ext cx="960120" cy="960120"/>
+          </a:xfrm>
+          <a:prstGeom prst="ellipse">
+            <a:avLst/>
+          </a:prstGeom>
+          <a:solidFill>
+            <a:srgbClr val="8E55B8"/>
+          </a:solidFill>
+          <a:ln>
+            <a:noFill/>
+          </a:ln>
+          <a:effectLst/>
+        </p:spPr>
+        <p:style>
+          <a:lnRef idx="1">
+            <a:schemeClr val="accent1"/>
+          </a:lnRef>
+          <a:fillRef idx="3">
+            <a:schemeClr val="accent1"/>
+          </a:fillRef>
+          <a:effectRef idx="2">
+            <a:schemeClr val="accent1"/>
+          </a:effectRef>
+          <a:fontRef idx="minor">
+            <a:schemeClr val="lt1"/>
+          </a:fontRef>
+        </p:style>
+        <p:txBody>
           <a:bodyPr rtlCol="0" anchor="ctr" wrap="square" lIns="45720" rIns="45720"/>
           <a:lstStyle/>
           <a:p>
             <a:pPr algn="ctr"/>
             <a:r>
-              <a:rPr sz="2600" b="1">
+              <a:rPr sz="2800" b="1">
                 <a:solidFill>
                   <a:srgbClr val="FFFFFF"/>
                 </a:solidFill>
                 <a:latin typeface="Meiryo UI"/>
               </a:rPr>
-              <a:t>④</a:t>
-            </a:r>
-          </a:p>
-        </p:txBody>
-      </p:sp>
-      <p:sp>
-        <p:nvSpPr>
-          <p:cNvPr id="14" name="TextBox 13"/>
+              <a:t>7</a:t>
+            </a:r>
+          </a:p>
+        </p:txBody>
+      </p:sp>
+      <p:sp>
+        <p:nvSpPr>
+          <p:cNvPr id="21" name="TextBox 20"/>
           <p:cNvSpPr txBox="1"/>
           <p:nvPr/>
         </p:nvSpPr>
         <p:spPr>
           <a:xfrm>
-            <a:off x="7315200" y="1691640"/>
-            <a:ext cx="4389120" cy="457200"/>
+            <a:off x="9144000" y="3108960"/>
+            <a:ext cx="2423160" cy="548640"/>
+          </a:xfrm>
+          <a:prstGeom prst="rect">
+            <a:avLst/>
+          </a:prstGeom>
+          <a:noFill/>
+        </p:spPr>
+        <p:txBody>
+          <a:bodyPr wrap="square" anchor="t" lIns="45720" rIns="45720">
+            <a:spAutoFit/>
+          </a:bodyPr>
+          <a:lstStyle/>
+          <a:p>
+            <a:pPr algn="ctr">
+              <a:spcAft>
+                <a:spcPts val="600"/>
+              </a:spcAft>
+            </a:pPr>
+            <a:r>
+              <a:rPr sz="2400" b="1">
+                <a:solidFill>
+                  <a:srgbClr val="2B2350"/>
+                </a:solidFill>
+                <a:latin typeface="Meiryo UI"/>
+              </a:rPr>
+              <a:t>第7チャクラ</a:t>
+            </a:r>
+          </a:p>
+        </p:txBody>
+      </p:sp>
+      <p:sp>
+        <p:nvSpPr>
+          <p:cNvPr id="22" name="TextBox 21"/>
+          <p:cNvSpPr txBox="1"/>
+          <p:nvPr/>
+        </p:nvSpPr>
+        <p:spPr>
+          <a:xfrm>
+            <a:off x="9144000" y="3657600"/>
+            <a:ext cx="2423160" cy="457200"/>
+          </a:xfrm>
+          <a:prstGeom prst="rect">
+            <a:avLst/>
+          </a:prstGeom>
+          <a:noFill/>
+        </p:spPr>
+        <p:txBody>
+          <a:bodyPr wrap="square" anchor="t" lIns="45720" rIns="45720">
+            <a:spAutoFit/>
+          </a:bodyPr>
+          <a:lstStyle/>
+          <a:p>
+            <a:pPr algn="ctr">
+              <a:spcAft>
+                <a:spcPts val="600"/>
+              </a:spcAft>
+            </a:pPr>
+            <a:r>
+              <a:rPr sz="1800" b="0">
+                <a:solidFill>
+                  <a:srgbClr val="666666"/>
+                </a:solidFill>
+                <a:latin typeface="Meiryo UI"/>
+              </a:rPr>
+              <a:t>頭のてっぺん</a:t>
+            </a:r>
+          </a:p>
+        </p:txBody>
+      </p:sp>
+      <p:sp>
+        <p:nvSpPr>
+          <p:cNvPr id="23" name="TextBox 22"/>
+          <p:cNvSpPr txBox="1"/>
+          <p:nvPr/>
+        </p:nvSpPr>
+        <p:spPr>
+          <a:xfrm>
+            <a:off x="9281160" y="4297680"/>
+            <a:ext cx="2286000" cy="1828800"/>
           </a:xfrm>
           <a:prstGeom prst="rect">
             <a:avLst/>
@@ -4162,38 +4582,15 @@
               </a:spcAft>
             </a:pPr>
             <a:r>
-              <a:rPr sz="2200" b="1">
-                <a:solidFill>
-                  <a:srgbClr val="2B2350"/>
-                </a:solidFill>
-                <a:latin typeface="Meiryo UI"/>
-              </a:rPr>
-              <a:t>質問する</a:t>
-            </a:r>
-          </a:p>
-        </p:txBody>
-      </p:sp>
-      <p:sp>
-        <p:nvSpPr>
-          <p:cNvPr id="15" name="TextBox 14"/>
-          <p:cNvSpPr txBox="1"/>
-          <p:nvPr/>
-        </p:nvSpPr>
-        <p:spPr>
-          <a:xfrm>
-            <a:off x="7315200" y="2148840"/>
-            <a:ext cx="4389120" cy="1005840"/>
-          </a:xfrm>
-          <a:prstGeom prst="rect">
-            <a:avLst/>
-          </a:prstGeom>
-          <a:noFill/>
-        </p:spPr>
-        <p:txBody>
-          <a:bodyPr wrap="square" anchor="t" lIns="45720" rIns="45720">
-            <a:spAutoFit/>
-          </a:bodyPr>
-          <a:lstStyle/>
+              <a:rPr sz="1900" b="0">
+                <a:solidFill>
+                  <a:srgbClr val="2A2A2A"/>
+                </a:solidFill>
+                <a:latin typeface="Meiryo UI"/>
+              </a:rPr>
+              <a:t>・宇宙とのつながり</a:t>
+            </a:r>
+          </a:p>
           <a:p>
             <a:pPr algn="l">
               <a:spcAft>
@@ -4201,275 +4598,13 @@
               </a:spcAft>
             </a:pPr>
             <a:r>
-              <a:rPr sz="1700" b="0">
+              <a:rPr sz="1900" b="0">
                 <a:solidFill>
                   <a:srgbClr val="2A2A2A"/>
                 </a:solidFill>
                 <a:latin typeface="Meiryo UI"/>
               </a:rPr>
-              <a:t>「はい・いいえ」で答えられる質問をする（例：元気？　さみしい？）</a:t>
-            </a:r>
-          </a:p>
-        </p:txBody>
-      </p:sp>
-      <p:sp>
-        <p:nvSpPr>
-          <p:cNvPr id="16" name="Oval 15"/>
-          <p:cNvSpPr/>
-          <p:nvPr/>
-        </p:nvSpPr>
-        <p:spPr>
-          <a:xfrm>
-            <a:off x="6217920" y="3429000"/>
-            <a:ext cx="914400" cy="914400"/>
-          </a:xfrm>
-          <a:prstGeom prst="ellipse">
-            <a:avLst/>
-          </a:prstGeom>
-          <a:solidFill>
-            <a:srgbClr val="C9973A"/>
-          </a:solidFill>
-          <a:ln>
-            <a:noFill/>
-          </a:ln>
-          <a:effectLst/>
-        </p:spPr>
-        <p:style>
-          <a:lnRef idx="1">
-            <a:schemeClr val="accent1"/>
-          </a:lnRef>
-          <a:fillRef idx="3">
-            <a:schemeClr val="accent1"/>
-          </a:fillRef>
-          <a:effectRef idx="2">
-            <a:schemeClr val="accent1"/>
-          </a:effectRef>
-          <a:fontRef idx="minor">
-            <a:schemeClr val="lt1"/>
-          </a:fontRef>
-        </p:style>
-        <p:txBody>
-          <a:bodyPr rtlCol="0" anchor="ctr" wrap="square" lIns="45720" rIns="45720"/>
-          <a:lstStyle/>
-          <a:p>
-            <a:pPr algn="ctr"/>
-            <a:r>
-              <a:rPr sz="2600" b="1">
-                <a:solidFill>
-                  <a:srgbClr val="FFFFFF"/>
-                </a:solidFill>
-                <a:latin typeface="Meiryo UI"/>
-              </a:rPr>
-              <a:t>⑤</a:t>
-            </a:r>
-          </a:p>
-        </p:txBody>
-      </p:sp>
-      <p:sp>
-        <p:nvSpPr>
-          <p:cNvPr id="17" name="TextBox 16"/>
-          <p:cNvSpPr txBox="1"/>
-          <p:nvPr/>
-        </p:nvSpPr>
-        <p:spPr>
-          <a:xfrm>
-            <a:off x="7315200" y="3291840"/>
-            <a:ext cx="4389120" cy="457200"/>
-          </a:xfrm>
-          <a:prstGeom prst="rect">
-            <a:avLst/>
-          </a:prstGeom>
-          <a:noFill/>
-        </p:spPr>
-        <p:txBody>
-          <a:bodyPr wrap="square" anchor="t" lIns="45720" rIns="45720">
-            <a:spAutoFit/>
-          </a:bodyPr>
-          <a:lstStyle/>
-          <a:p>
-            <a:pPr algn="l">
-              <a:spcAft>
-                <a:spcPts val="600"/>
-              </a:spcAft>
-            </a:pPr>
-            <a:r>
-              <a:rPr sz="2200" b="1">
-                <a:solidFill>
-                  <a:srgbClr val="2B2350"/>
-                </a:solidFill>
-                <a:latin typeface="Meiryo UI"/>
-              </a:rPr>
-              <a:t>送る</a:t>
-            </a:r>
-          </a:p>
-        </p:txBody>
-      </p:sp>
-      <p:sp>
-        <p:nvSpPr>
-          <p:cNvPr id="18" name="TextBox 17"/>
-          <p:cNvSpPr txBox="1"/>
-          <p:nvPr/>
-        </p:nvSpPr>
-        <p:spPr>
-          <a:xfrm>
-            <a:off x="7315200" y="3749039"/>
-            <a:ext cx="4389120" cy="1005840"/>
-          </a:xfrm>
-          <a:prstGeom prst="rect">
-            <a:avLst/>
-          </a:prstGeom>
-          <a:noFill/>
-        </p:spPr>
-        <p:txBody>
-          <a:bodyPr wrap="square" anchor="t" lIns="45720" rIns="45720">
-            <a:spAutoFit/>
-          </a:bodyPr>
-          <a:lstStyle/>
-          <a:p>
-            <a:pPr algn="l">
-              <a:spcAft>
-                <a:spcPts val="600"/>
-              </a:spcAft>
-            </a:pPr>
-            <a:r>
-              <a:rPr sz="1700" b="0">
-                <a:solidFill>
-                  <a:srgbClr val="2A2A2A"/>
-                </a:solidFill>
-                <a:latin typeface="Meiryo UI"/>
-              </a:rPr>
-              <a:t>「エネルギーを送るね」と、エネルギーを送る</a:t>
-            </a:r>
-          </a:p>
-        </p:txBody>
-      </p:sp>
-      <p:sp>
-        <p:nvSpPr>
-          <p:cNvPr id="19" name="Oval 18"/>
-          <p:cNvSpPr/>
-          <p:nvPr/>
-        </p:nvSpPr>
-        <p:spPr>
-          <a:xfrm>
-            <a:off x="6217920" y="5029200"/>
-            <a:ext cx="914400" cy="914400"/>
-          </a:xfrm>
-          <a:prstGeom prst="ellipse">
-            <a:avLst/>
-          </a:prstGeom>
-          <a:solidFill>
-            <a:srgbClr val="C9973A"/>
-          </a:solidFill>
-          <a:ln>
-            <a:noFill/>
-          </a:ln>
-          <a:effectLst/>
-        </p:spPr>
-        <p:style>
-          <a:lnRef idx="1">
-            <a:schemeClr val="accent1"/>
-          </a:lnRef>
-          <a:fillRef idx="3">
-            <a:schemeClr val="accent1"/>
-          </a:fillRef>
-          <a:effectRef idx="2">
-            <a:schemeClr val="accent1"/>
-          </a:effectRef>
-          <a:fontRef idx="minor">
-            <a:schemeClr val="lt1"/>
-          </a:fontRef>
-        </p:style>
-        <p:txBody>
-          <a:bodyPr rtlCol="0" anchor="ctr" wrap="square" lIns="45720" rIns="45720"/>
-          <a:lstStyle/>
-          <a:p>
-            <a:pPr algn="ctr"/>
-            <a:r>
-              <a:rPr sz="2600" b="1">
-                <a:solidFill>
-                  <a:srgbClr val="FFFFFF"/>
-                </a:solidFill>
-                <a:latin typeface="Meiryo UI"/>
-              </a:rPr>
-              <a:t>⑥</a:t>
-            </a:r>
-          </a:p>
-        </p:txBody>
-      </p:sp>
-      <p:sp>
-        <p:nvSpPr>
-          <p:cNvPr id="20" name="TextBox 19"/>
-          <p:cNvSpPr txBox="1"/>
-          <p:nvPr/>
-        </p:nvSpPr>
-        <p:spPr>
-          <a:xfrm>
-            <a:off x="7315200" y="4892040"/>
-            <a:ext cx="4389120" cy="457200"/>
-          </a:xfrm>
-          <a:prstGeom prst="rect">
-            <a:avLst/>
-          </a:prstGeom>
-          <a:noFill/>
-        </p:spPr>
-        <p:txBody>
-          <a:bodyPr wrap="square" anchor="t" lIns="45720" rIns="45720">
-            <a:spAutoFit/>
-          </a:bodyPr>
-          <a:lstStyle/>
-          <a:p>
-            <a:pPr algn="l">
-              <a:spcAft>
-                <a:spcPts val="600"/>
-              </a:spcAft>
-            </a:pPr>
-            <a:r>
-              <a:rPr sz="2200" b="1">
-                <a:solidFill>
-                  <a:srgbClr val="2B2350"/>
-                </a:solidFill>
-                <a:latin typeface="Meiryo UI"/>
-              </a:rPr>
-              <a:t>戻す</a:t>
-            </a:r>
-          </a:p>
-        </p:txBody>
-      </p:sp>
-      <p:sp>
-        <p:nvSpPr>
-          <p:cNvPr id="21" name="TextBox 20"/>
-          <p:cNvSpPr txBox="1"/>
-          <p:nvPr/>
-        </p:nvSpPr>
-        <p:spPr>
-          <a:xfrm>
-            <a:off x="7315200" y="5349240"/>
-            <a:ext cx="4389120" cy="1005840"/>
-          </a:xfrm>
-          <a:prstGeom prst="rect">
-            <a:avLst/>
-          </a:prstGeom>
-          <a:noFill/>
-        </p:spPr>
-        <p:txBody>
-          <a:bodyPr wrap="square" anchor="t" lIns="45720" rIns="45720">
-            <a:spAutoFit/>
-          </a:bodyPr>
-          <a:lstStyle/>
-          <a:p>
-            <a:pPr algn="l">
-              <a:spcAft>
-                <a:spcPts val="600"/>
-              </a:spcAft>
-            </a:pPr>
-            <a:r>
-              <a:rPr sz="1700" b="0">
-                <a:solidFill>
-                  <a:srgbClr val="2A2A2A"/>
-                </a:solidFill>
-                <a:latin typeface="Meiryo UI"/>
-              </a:rPr>
-              <a:t>「教えてくれてありがとう」と、元の位置に戻す</a:t>
+              <a:t>・生きる意味・ひらめき</a:t>
             </a:r>
           </a:p>
         </p:txBody>
@@ -4483,6 +4618,896 @@
 </file>
 
 <file path=ppt/slides/slide11.xml><?xml version="1.0" encoding="utf-8"?>
+<p:sld xmlns:a="http://schemas.openxmlformats.org/drawingml/2006/main" xmlns:p="http://schemas.openxmlformats.org/presentationml/2006/main" xmlns:r="http://schemas.openxmlformats.org/officeDocument/2006/relationships">
+  <p:cSld>
+    <p:bg>
+      <p:bgPr>
+        <a:solidFill>
+          <a:srgbClr val="FFFFFF"/>
+        </a:solidFill>
+        <a:effectLst/>
+      </p:bgPr>
+    </p:bg>
+    <p:spTree>
+      <p:nvGrpSpPr>
+        <p:cNvPr id="1" name=""/>
+        <p:cNvGrpSpPr/>
+        <p:nvPr/>
+      </p:nvGrpSpPr>
+      <p:grpSpPr/>
+      <p:sp>
+        <p:nvSpPr>
+          <p:cNvPr id="2" name="TextBox 1"/>
+          <p:cNvSpPr txBox="1"/>
+          <p:nvPr/>
+        </p:nvSpPr>
+        <p:spPr>
+          <a:xfrm>
+            <a:off x="548640" y="320040"/>
+            <a:ext cx="11064240" cy="822960"/>
+          </a:xfrm>
+          <a:prstGeom prst="rect">
+            <a:avLst/>
+          </a:prstGeom>
+          <a:noFill/>
+        </p:spPr>
+        <p:txBody>
+          <a:bodyPr wrap="square" anchor="t" lIns="45720" rIns="45720">
+            <a:spAutoFit/>
+          </a:bodyPr>
+          <a:lstStyle/>
+          <a:p>
+            <a:pPr algn="l">
+              <a:spcAft>
+                <a:spcPts val="600"/>
+              </a:spcAft>
+            </a:pPr>
+            <a:r>
+              <a:rPr sz="3600" b="1">
+                <a:solidFill>
+                  <a:srgbClr val="2B2350"/>
+                </a:solidFill>
+                <a:latin typeface="Meiryo UI"/>
+              </a:rPr>
+              <a:t>チャクラを育てるやり方</a:t>
+            </a:r>
+          </a:p>
+        </p:txBody>
+      </p:sp>
+      <p:sp>
+        <p:nvSpPr>
+          <p:cNvPr id="3" name="TextBox 2"/>
+          <p:cNvSpPr txBox="1"/>
+          <p:nvPr/>
+        </p:nvSpPr>
+        <p:spPr>
+          <a:xfrm>
+            <a:off x="548640" y="1051560"/>
+            <a:ext cx="11064240" cy="457200"/>
+          </a:xfrm>
+          <a:prstGeom prst="rect">
+            <a:avLst/>
+          </a:prstGeom>
+          <a:noFill/>
+        </p:spPr>
+        <p:txBody>
+          <a:bodyPr wrap="square" anchor="t" lIns="45720" rIns="45720">
+            <a:spAutoFit/>
+          </a:bodyPr>
+          <a:lstStyle/>
+          <a:p>
+            <a:pPr algn="l">
+              <a:spcAft>
+                <a:spcPts val="600"/>
+              </a:spcAft>
+            </a:pPr>
+            <a:r>
+              <a:rPr sz="1800" b="0">
+                <a:solidFill>
+                  <a:srgbClr val="666666"/>
+                </a:solidFill>
+                <a:latin typeface="Meiryo UI"/>
+              </a:rPr>
+              <a:t>一つずつ、順番に活性化していきます</a:t>
+            </a:r>
+          </a:p>
+        </p:txBody>
+      </p:sp>
+      <p:sp>
+        <p:nvSpPr>
+          <p:cNvPr id="4" name="Oval 3"/>
+          <p:cNvSpPr/>
+          <p:nvPr/>
+        </p:nvSpPr>
+        <p:spPr>
+          <a:xfrm>
+            <a:off x="548640" y="1828800"/>
+            <a:ext cx="914400" cy="914400"/>
+          </a:xfrm>
+          <a:prstGeom prst="ellipse">
+            <a:avLst/>
+          </a:prstGeom>
+          <a:solidFill>
+            <a:srgbClr val="C9973A"/>
+          </a:solidFill>
+          <a:ln>
+            <a:noFill/>
+          </a:ln>
+          <a:effectLst/>
+        </p:spPr>
+        <p:style>
+          <a:lnRef idx="1">
+            <a:schemeClr val="accent1"/>
+          </a:lnRef>
+          <a:fillRef idx="3">
+            <a:schemeClr val="accent1"/>
+          </a:fillRef>
+          <a:effectRef idx="2">
+            <a:schemeClr val="accent1"/>
+          </a:effectRef>
+          <a:fontRef idx="minor">
+            <a:schemeClr val="lt1"/>
+          </a:fontRef>
+        </p:style>
+        <p:txBody>
+          <a:bodyPr rtlCol="0" anchor="ctr" wrap="square" lIns="45720" rIns="45720"/>
+          <a:lstStyle/>
+          <a:p>
+            <a:pPr algn="ctr"/>
+            <a:r>
+              <a:rPr sz="2600" b="1">
+                <a:solidFill>
+                  <a:srgbClr val="FFFFFF"/>
+                </a:solidFill>
+                <a:latin typeface="Meiryo UI"/>
+              </a:rPr>
+              <a:t>①</a:t>
+            </a:r>
+          </a:p>
+        </p:txBody>
+      </p:sp>
+      <p:sp>
+        <p:nvSpPr>
+          <p:cNvPr id="5" name="TextBox 4"/>
+          <p:cNvSpPr txBox="1"/>
+          <p:nvPr/>
+        </p:nvSpPr>
+        <p:spPr>
+          <a:xfrm>
+            <a:off x="1645919" y="1691640"/>
+            <a:ext cx="4389120" cy="457200"/>
+          </a:xfrm>
+          <a:prstGeom prst="rect">
+            <a:avLst/>
+          </a:prstGeom>
+          <a:noFill/>
+        </p:spPr>
+        <p:txBody>
+          <a:bodyPr wrap="square" anchor="t" lIns="45720" rIns="45720">
+            <a:spAutoFit/>
+          </a:bodyPr>
+          <a:lstStyle/>
+          <a:p>
+            <a:pPr algn="l">
+              <a:spcAft>
+                <a:spcPts val="600"/>
+              </a:spcAft>
+            </a:pPr>
+            <a:r>
+              <a:rPr sz="2200" b="1">
+                <a:solidFill>
+                  <a:srgbClr val="2B2350"/>
+                </a:solidFill>
+                <a:latin typeface="Meiryo UI"/>
+              </a:rPr>
+              <a:t>光の手</a:t>
+            </a:r>
+          </a:p>
+        </p:txBody>
+      </p:sp>
+      <p:sp>
+        <p:nvSpPr>
+          <p:cNvPr id="6" name="TextBox 5"/>
+          <p:cNvSpPr txBox="1"/>
+          <p:nvPr/>
+        </p:nvSpPr>
+        <p:spPr>
+          <a:xfrm>
+            <a:off x="1645919" y="2148840"/>
+            <a:ext cx="4389120" cy="1005840"/>
+          </a:xfrm>
+          <a:prstGeom prst="rect">
+            <a:avLst/>
+          </a:prstGeom>
+          <a:noFill/>
+        </p:spPr>
+        <p:txBody>
+          <a:bodyPr wrap="square" anchor="t" lIns="45720" rIns="45720">
+            <a:spAutoFit/>
+          </a:bodyPr>
+          <a:lstStyle/>
+          <a:p>
+            <a:pPr algn="l">
+              <a:spcAft>
+                <a:spcPts val="600"/>
+              </a:spcAft>
+            </a:pPr>
+            <a:r>
+              <a:rPr sz="1700" b="0">
+                <a:solidFill>
+                  <a:srgbClr val="2A2A2A"/>
+                </a:solidFill>
+                <a:latin typeface="Meiryo UI"/>
+              </a:rPr>
+              <a:t>手にタマラをコーティングして「光の手」に変える</a:t>
+            </a:r>
+          </a:p>
+        </p:txBody>
+      </p:sp>
+      <p:sp>
+        <p:nvSpPr>
+          <p:cNvPr id="7" name="Oval 6"/>
+          <p:cNvSpPr/>
+          <p:nvPr/>
+        </p:nvSpPr>
+        <p:spPr>
+          <a:xfrm>
+            <a:off x="548640" y="3429000"/>
+            <a:ext cx="914400" cy="914400"/>
+          </a:xfrm>
+          <a:prstGeom prst="ellipse">
+            <a:avLst/>
+          </a:prstGeom>
+          <a:solidFill>
+            <a:srgbClr val="C9973A"/>
+          </a:solidFill>
+          <a:ln>
+            <a:noFill/>
+          </a:ln>
+          <a:effectLst/>
+        </p:spPr>
+        <p:style>
+          <a:lnRef idx="1">
+            <a:schemeClr val="accent1"/>
+          </a:lnRef>
+          <a:fillRef idx="3">
+            <a:schemeClr val="accent1"/>
+          </a:fillRef>
+          <a:effectRef idx="2">
+            <a:schemeClr val="accent1"/>
+          </a:effectRef>
+          <a:fontRef idx="minor">
+            <a:schemeClr val="lt1"/>
+          </a:fontRef>
+        </p:style>
+        <p:txBody>
+          <a:bodyPr rtlCol="0" anchor="ctr" wrap="square" lIns="45720" rIns="45720"/>
+          <a:lstStyle/>
+          <a:p>
+            <a:pPr algn="ctr"/>
+            <a:r>
+              <a:rPr sz="2600" b="1">
+                <a:solidFill>
+                  <a:srgbClr val="FFFFFF"/>
+                </a:solidFill>
+                <a:latin typeface="Meiryo UI"/>
+              </a:rPr>
+              <a:t>②</a:t>
+            </a:r>
+          </a:p>
+        </p:txBody>
+      </p:sp>
+      <p:sp>
+        <p:nvSpPr>
+          <p:cNvPr id="8" name="TextBox 7"/>
+          <p:cNvSpPr txBox="1"/>
+          <p:nvPr/>
+        </p:nvSpPr>
+        <p:spPr>
+          <a:xfrm>
+            <a:off x="1645919" y="3291840"/>
+            <a:ext cx="4389120" cy="457200"/>
+          </a:xfrm>
+          <a:prstGeom prst="rect">
+            <a:avLst/>
+          </a:prstGeom>
+          <a:noFill/>
+        </p:spPr>
+        <p:txBody>
+          <a:bodyPr wrap="square" anchor="t" lIns="45720" rIns="45720">
+            <a:spAutoFit/>
+          </a:bodyPr>
+          <a:lstStyle/>
+          <a:p>
+            <a:pPr algn="l">
+              <a:spcAft>
+                <a:spcPts val="600"/>
+              </a:spcAft>
+            </a:pPr>
+            <a:r>
+              <a:rPr sz="2200" b="1">
+                <a:solidFill>
+                  <a:srgbClr val="2B2350"/>
+                </a:solidFill>
+                <a:latin typeface="Meiryo UI"/>
+              </a:rPr>
+              <a:t>取り出す</a:t>
+            </a:r>
+          </a:p>
+        </p:txBody>
+      </p:sp>
+      <p:sp>
+        <p:nvSpPr>
+          <p:cNvPr id="9" name="TextBox 8"/>
+          <p:cNvSpPr txBox="1"/>
+          <p:nvPr/>
+        </p:nvSpPr>
+        <p:spPr>
+          <a:xfrm>
+            <a:off x="1645919" y="3749039"/>
+            <a:ext cx="4389120" cy="1005840"/>
+          </a:xfrm>
+          <a:prstGeom prst="rect">
+            <a:avLst/>
+          </a:prstGeom>
+          <a:noFill/>
+        </p:spPr>
+        <p:txBody>
+          <a:bodyPr wrap="square" anchor="t" lIns="45720" rIns="45720">
+            <a:spAutoFit/>
+          </a:bodyPr>
+          <a:lstStyle/>
+          <a:p>
+            <a:pPr algn="l">
+              <a:spcAft>
+                <a:spcPts val="600"/>
+              </a:spcAft>
+            </a:pPr>
+            <a:r>
+              <a:rPr sz="1700" b="0">
+                <a:solidFill>
+                  <a:srgbClr val="2A2A2A"/>
+                </a:solidFill>
+                <a:latin typeface="Meiryo UI"/>
+              </a:rPr>
+              <a:t>チャクラに向かって「チャクラさん、教えてください」と声をかけ、手の上に取り出す</a:t>
+            </a:r>
+          </a:p>
+        </p:txBody>
+      </p:sp>
+      <p:sp>
+        <p:nvSpPr>
+          <p:cNvPr id="10" name="Oval 9"/>
+          <p:cNvSpPr/>
+          <p:nvPr/>
+        </p:nvSpPr>
+        <p:spPr>
+          <a:xfrm>
+            <a:off x="548640" y="5029200"/>
+            <a:ext cx="914400" cy="914400"/>
+          </a:xfrm>
+          <a:prstGeom prst="ellipse">
+            <a:avLst/>
+          </a:prstGeom>
+          <a:solidFill>
+            <a:srgbClr val="C9973A"/>
+          </a:solidFill>
+          <a:ln>
+            <a:noFill/>
+          </a:ln>
+          <a:effectLst/>
+        </p:spPr>
+        <p:style>
+          <a:lnRef idx="1">
+            <a:schemeClr val="accent1"/>
+          </a:lnRef>
+          <a:fillRef idx="3">
+            <a:schemeClr val="accent1"/>
+          </a:fillRef>
+          <a:effectRef idx="2">
+            <a:schemeClr val="accent1"/>
+          </a:effectRef>
+          <a:fontRef idx="minor">
+            <a:schemeClr val="lt1"/>
+          </a:fontRef>
+        </p:style>
+        <p:txBody>
+          <a:bodyPr rtlCol="0" anchor="ctr" wrap="square" lIns="45720" rIns="45720"/>
+          <a:lstStyle/>
+          <a:p>
+            <a:pPr algn="ctr"/>
+            <a:r>
+              <a:rPr sz="2600" b="1">
+                <a:solidFill>
+                  <a:srgbClr val="FFFFFF"/>
+                </a:solidFill>
+                <a:latin typeface="Meiryo UI"/>
+              </a:rPr>
+              <a:t>③</a:t>
+            </a:r>
+          </a:p>
+        </p:txBody>
+      </p:sp>
+      <p:sp>
+        <p:nvSpPr>
+          <p:cNvPr id="11" name="TextBox 10"/>
+          <p:cNvSpPr txBox="1"/>
+          <p:nvPr/>
+        </p:nvSpPr>
+        <p:spPr>
+          <a:xfrm>
+            <a:off x="1645919" y="4892040"/>
+            <a:ext cx="4389120" cy="457200"/>
+          </a:xfrm>
+          <a:prstGeom prst="rect">
+            <a:avLst/>
+          </a:prstGeom>
+          <a:noFill/>
+        </p:spPr>
+        <p:txBody>
+          <a:bodyPr wrap="square" anchor="t" lIns="45720" rIns="45720">
+            <a:spAutoFit/>
+          </a:bodyPr>
+          <a:lstStyle/>
+          <a:p>
+            <a:pPr algn="l">
+              <a:spcAft>
+                <a:spcPts val="600"/>
+              </a:spcAft>
+            </a:pPr>
+            <a:r>
+              <a:rPr sz="2200" b="1">
+                <a:solidFill>
+                  <a:srgbClr val="2B2350"/>
+                </a:solidFill>
+                <a:latin typeface="Meiryo UI"/>
+              </a:rPr>
+              <a:t>形を見る</a:t>
+            </a:r>
+          </a:p>
+        </p:txBody>
+      </p:sp>
+      <p:sp>
+        <p:nvSpPr>
+          <p:cNvPr id="12" name="TextBox 11"/>
+          <p:cNvSpPr txBox="1"/>
+          <p:nvPr/>
+        </p:nvSpPr>
+        <p:spPr>
+          <a:xfrm>
+            <a:off x="1645919" y="5349240"/>
+            <a:ext cx="4389120" cy="1005840"/>
+          </a:xfrm>
+          <a:prstGeom prst="rect">
+            <a:avLst/>
+          </a:prstGeom>
+          <a:noFill/>
+        </p:spPr>
+        <p:txBody>
+          <a:bodyPr wrap="square" anchor="t" lIns="45720" rIns="45720">
+            <a:spAutoFit/>
+          </a:bodyPr>
+          <a:lstStyle/>
+          <a:p>
+            <a:pPr algn="l">
+              <a:spcAft>
+                <a:spcPts val="600"/>
+              </a:spcAft>
+            </a:pPr>
+            <a:r>
+              <a:rPr sz="1700" b="0">
+                <a:solidFill>
+                  <a:srgbClr val="2A2A2A"/>
+                </a:solidFill>
+                <a:latin typeface="Meiryo UI"/>
+              </a:rPr>
+              <a:t>チャクラがどんな形か想像する（人によっても、チャクラによっても違います）</a:t>
+            </a:r>
+          </a:p>
+        </p:txBody>
+      </p:sp>
+      <p:sp>
+        <p:nvSpPr>
+          <p:cNvPr id="13" name="Oval 12"/>
+          <p:cNvSpPr/>
+          <p:nvPr/>
+        </p:nvSpPr>
+        <p:spPr>
+          <a:xfrm>
+            <a:off x="6217920" y="1828800"/>
+            <a:ext cx="914400" cy="914400"/>
+          </a:xfrm>
+          <a:prstGeom prst="ellipse">
+            <a:avLst/>
+          </a:prstGeom>
+          <a:solidFill>
+            <a:srgbClr val="C9973A"/>
+          </a:solidFill>
+          <a:ln>
+            <a:noFill/>
+          </a:ln>
+          <a:effectLst/>
+        </p:spPr>
+        <p:style>
+          <a:lnRef idx="1">
+            <a:schemeClr val="accent1"/>
+          </a:lnRef>
+          <a:fillRef idx="3">
+            <a:schemeClr val="accent1"/>
+          </a:fillRef>
+          <a:effectRef idx="2">
+            <a:schemeClr val="accent1"/>
+          </a:effectRef>
+          <a:fontRef idx="minor">
+            <a:schemeClr val="lt1"/>
+          </a:fontRef>
+        </p:style>
+        <p:txBody>
+          <a:bodyPr rtlCol="0" anchor="ctr" wrap="square" lIns="45720" rIns="45720"/>
+          <a:lstStyle/>
+          <a:p>
+            <a:pPr algn="ctr"/>
+            <a:r>
+              <a:rPr sz="2600" b="1">
+                <a:solidFill>
+                  <a:srgbClr val="FFFFFF"/>
+                </a:solidFill>
+                <a:latin typeface="Meiryo UI"/>
+              </a:rPr>
+              <a:t>④</a:t>
+            </a:r>
+          </a:p>
+        </p:txBody>
+      </p:sp>
+      <p:sp>
+        <p:nvSpPr>
+          <p:cNvPr id="14" name="TextBox 13"/>
+          <p:cNvSpPr txBox="1"/>
+          <p:nvPr/>
+        </p:nvSpPr>
+        <p:spPr>
+          <a:xfrm>
+            <a:off x="7315200" y="1691640"/>
+            <a:ext cx="4389120" cy="457200"/>
+          </a:xfrm>
+          <a:prstGeom prst="rect">
+            <a:avLst/>
+          </a:prstGeom>
+          <a:noFill/>
+        </p:spPr>
+        <p:txBody>
+          <a:bodyPr wrap="square" anchor="t" lIns="45720" rIns="45720">
+            <a:spAutoFit/>
+          </a:bodyPr>
+          <a:lstStyle/>
+          <a:p>
+            <a:pPr algn="l">
+              <a:spcAft>
+                <a:spcPts val="600"/>
+              </a:spcAft>
+            </a:pPr>
+            <a:r>
+              <a:rPr sz="2200" b="1">
+                <a:solidFill>
+                  <a:srgbClr val="2B2350"/>
+                </a:solidFill>
+                <a:latin typeface="Meiryo UI"/>
+              </a:rPr>
+              <a:t>質問する</a:t>
+            </a:r>
+          </a:p>
+        </p:txBody>
+      </p:sp>
+      <p:sp>
+        <p:nvSpPr>
+          <p:cNvPr id="15" name="TextBox 14"/>
+          <p:cNvSpPr txBox="1"/>
+          <p:nvPr/>
+        </p:nvSpPr>
+        <p:spPr>
+          <a:xfrm>
+            <a:off x="7315200" y="2148840"/>
+            <a:ext cx="4389120" cy="1005840"/>
+          </a:xfrm>
+          <a:prstGeom prst="rect">
+            <a:avLst/>
+          </a:prstGeom>
+          <a:noFill/>
+        </p:spPr>
+        <p:txBody>
+          <a:bodyPr wrap="square" anchor="t" lIns="45720" rIns="45720">
+            <a:spAutoFit/>
+          </a:bodyPr>
+          <a:lstStyle/>
+          <a:p>
+            <a:pPr algn="l">
+              <a:spcAft>
+                <a:spcPts val="600"/>
+              </a:spcAft>
+            </a:pPr>
+            <a:r>
+              <a:rPr sz="1700" b="0">
+                <a:solidFill>
+                  <a:srgbClr val="2A2A2A"/>
+                </a:solidFill>
+                <a:latin typeface="Meiryo UI"/>
+              </a:rPr>
+              <a:t>「はい・いいえ」で答えられる質問をする（例：元気？　さみしい？）</a:t>
+            </a:r>
+          </a:p>
+        </p:txBody>
+      </p:sp>
+      <p:sp>
+        <p:nvSpPr>
+          <p:cNvPr id="16" name="Oval 15"/>
+          <p:cNvSpPr/>
+          <p:nvPr/>
+        </p:nvSpPr>
+        <p:spPr>
+          <a:xfrm>
+            <a:off x="6217920" y="3429000"/>
+            <a:ext cx="914400" cy="914400"/>
+          </a:xfrm>
+          <a:prstGeom prst="ellipse">
+            <a:avLst/>
+          </a:prstGeom>
+          <a:solidFill>
+            <a:srgbClr val="C9973A"/>
+          </a:solidFill>
+          <a:ln>
+            <a:noFill/>
+          </a:ln>
+          <a:effectLst/>
+        </p:spPr>
+        <p:style>
+          <a:lnRef idx="1">
+            <a:schemeClr val="accent1"/>
+          </a:lnRef>
+          <a:fillRef idx="3">
+            <a:schemeClr val="accent1"/>
+          </a:fillRef>
+          <a:effectRef idx="2">
+            <a:schemeClr val="accent1"/>
+          </a:effectRef>
+          <a:fontRef idx="minor">
+            <a:schemeClr val="lt1"/>
+          </a:fontRef>
+        </p:style>
+        <p:txBody>
+          <a:bodyPr rtlCol="0" anchor="ctr" wrap="square" lIns="45720" rIns="45720"/>
+          <a:lstStyle/>
+          <a:p>
+            <a:pPr algn="ctr"/>
+            <a:r>
+              <a:rPr sz="2600" b="1">
+                <a:solidFill>
+                  <a:srgbClr val="FFFFFF"/>
+                </a:solidFill>
+                <a:latin typeface="Meiryo UI"/>
+              </a:rPr>
+              <a:t>⑤</a:t>
+            </a:r>
+          </a:p>
+        </p:txBody>
+      </p:sp>
+      <p:sp>
+        <p:nvSpPr>
+          <p:cNvPr id="17" name="TextBox 16"/>
+          <p:cNvSpPr txBox="1"/>
+          <p:nvPr/>
+        </p:nvSpPr>
+        <p:spPr>
+          <a:xfrm>
+            <a:off x="7315200" y="3291840"/>
+            <a:ext cx="4389120" cy="457200"/>
+          </a:xfrm>
+          <a:prstGeom prst="rect">
+            <a:avLst/>
+          </a:prstGeom>
+          <a:noFill/>
+        </p:spPr>
+        <p:txBody>
+          <a:bodyPr wrap="square" anchor="t" lIns="45720" rIns="45720">
+            <a:spAutoFit/>
+          </a:bodyPr>
+          <a:lstStyle/>
+          <a:p>
+            <a:pPr algn="l">
+              <a:spcAft>
+                <a:spcPts val="600"/>
+              </a:spcAft>
+            </a:pPr>
+            <a:r>
+              <a:rPr sz="2200" b="1">
+                <a:solidFill>
+                  <a:srgbClr val="2B2350"/>
+                </a:solidFill>
+                <a:latin typeface="Meiryo UI"/>
+              </a:rPr>
+              <a:t>送る</a:t>
+            </a:r>
+          </a:p>
+        </p:txBody>
+      </p:sp>
+      <p:sp>
+        <p:nvSpPr>
+          <p:cNvPr id="18" name="TextBox 17"/>
+          <p:cNvSpPr txBox="1"/>
+          <p:nvPr/>
+        </p:nvSpPr>
+        <p:spPr>
+          <a:xfrm>
+            <a:off x="7315200" y="3749039"/>
+            <a:ext cx="4389120" cy="1005840"/>
+          </a:xfrm>
+          <a:prstGeom prst="rect">
+            <a:avLst/>
+          </a:prstGeom>
+          <a:noFill/>
+        </p:spPr>
+        <p:txBody>
+          <a:bodyPr wrap="square" anchor="t" lIns="45720" rIns="45720">
+            <a:spAutoFit/>
+          </a:bodyPr>
+          <a:lstStyle/>
+          <a:p>
+            <a:pPr algn="l">
+              <a:spcAft>
+                <a:spcPts val="600"/>
+              </a:spcAft>
+            </a:pPr>
+            <a:r>
+              <a:rPr sz="1700" b="0">
+                <a:solidFill>
+                  <a:srgbClr val="2A2A2A"/>
+                </a:solidFill>
+                <a:latin typeface="Meiryo UI"/>
+              </a:rPr>
+              <a:t>「エネルギーを送るね」と、エネルギーを送る</a:t>
+            </a:r>
+          </a:p>
+        </p:txBody>
+      </p:sp>
+      <p:sp>
+        <p:nvSpPr>
+          <p:cNvPr id="19" name="Oval 18"/>
+          <p:cNvSpPr/>
+          <p:nvPr/>
+        </p:nvSpPr>
+        <p:spPr>
+          <a:xfrm>
+            <a:off x="6217920" y="5029200"/>
+            <a:ext cx="914400" cy="914400"/>
+          </a:xfrm>
+          <a:prstGeom prst="ellipse">
+            <a:avLst/>
+          </a:prstGeom>
+          <a:solidFill>
+            <a:srgbClr val="C9973A"/>
+          </a:solidFill>
+          <a:ln>
+            <a:noFill/>
+          </a:ln>
+          <a:effectLst/>
+        </p:spPr>
+        <p:style>
+          <a:lnRef idx="1">
+            <a:schemeClr val="accent1"/>
+          </a:lnRef>
+          <a:fillRef idx="3">
+            <a:schemeClr val="accent1"/>
+          </a:fillRef>
+          <a:effectRef idx="2">
+            <a:schemeClr val="accent1"/>
+          </a:effectRef>
+          <a:fontRef idx="minor">
+            <a:schemeClr val="lt1"/>
+          </a:fontRef>
+        </p:style>
+        <p:txBody>
+          <a:bodyPr rtlCol="0" anchor="ctr" wrap="square" lIns="45720" rIns="45720"/>
+          <a:lstStyle/>
+          <a:p>
+            <a:pPr algn="ctr"/>
+            <a:r>
+              <a:rPr sz="2600" b="1">
+                <a:solidFill>
+                  <a:srgbClr val="FFFFFF"/>
+                </a:solidFill>
+                <a:latin typeface="Meiryo UI"/>
+              </a:rPr>
+              <a:t>⑥</a:t>
+            </a:r>
+          </a:p>
+        </p:txBody>
+      </p:sp>
+      <p:sp>
+        <p:nvSpPr>
+          <p:cNvPr id="20" name="TextBox 19"/>
+          <p:cNvSpPr txBox="1"/>
+          <p:nvPr/>
+        </p:nvSpPr>
+        <p:spPr>
+          <a:xfrm>
+            <a:off x="7315200" y="4892040"/>
+            <a:ext cx="4389120" cy="457200"/>
+          </a:xfrm>
+          <a:prstGeom prst="rect">
+            <a:avLst/>
+          </a:prstGeom>
+          <a:noFill/>
+        </p:spPr>
+        <p:txBody>
+          <a:bodyPr wrap="square" anchor="t" lIns="45720" rIns="45720">
+            <a:spAutoFit/>
+          </a:bodyPr>
+          <a:lstStyle/>
+          <a:p>
+            <a:pPr algn="l">
+              <a:spcAft>
+                <a:spcPts val="600"/>
+              </a:spcAft>
+            </a:pPr>
+            <a:r>
+              <a:rPr sz="2200" b="1">
+                <a:solidFill>
+                  <a:srgbClr val="2B2350"/>
+                </a:solidFill>
+                <a:latin typeface="Meiryo UI"/>
+              </a:rPr>
+              <a:t>戻す</a:t>
+            </a:r>
+          </a:p>
+        </p:txBody>
+      </p:sp>
+      <p:sp>
+        <p:nvSpPr>
+          <p:cNvPr id="21" name="TextBox 20"/>
+          <p:cNvSpPr txBox="1"/>
+          <p:nvPr/>
+        </p:nvSpPr>
+        <p:spPr>
+          <a:xfrm>
+            <a:off x="7315200" y="5349240"/>
+            <a:ext cx="4389120" cy="1005840"/>
+          </a:xfrm>
+          <a:prstGeom prst="rect">
+            <a:avLst/>
+          </a:prstGeom>
+          <a:noFill/>
+        </p:spPr>
+        <p:txBody>
+          <a:bodyPr wrap="square" anchor="t" lIns="45720" rIns="45720">
+            <a:spAutoFit/>
+          </a:bodyPr>
+          <a:lstStyle/>
+          <a:p>
+            <a:pPr algn="l">
+              <a:spcAft>
+                <a:spcPts val="600"/>
+              </a:spcAft>
+            </a:pPr>
+            <a:r>
+              <a:rPr sz="1700" b="0">
+                <a:solidFill>
+                  <a:srgbClr val="2A2A2A"/>
+                </a:solidFill>
+                <a:latin typeface="Meiryo UI"/>
+              </a:rPr>
+              <a:t>「教えてくれてありがとう」と、元の位置に戻す</a:t>
+            </a:r>
+          </a:p>
+        </p:txBody>
+      </p:sp>
+    </p:spTree>
+  </p:cSld>
+  <p:clrMapOvr>
+    <a:masterClrMapping/>
+  </p:clrMapOvr>
+</p:sld>
+</file>
+
+<file path=ppt/slides/slide12.xml><?xml version="1.0" encoding="utf-8"?>
 <p:sld xmlns:a="http://schemas.openxmlformats.org/drawingml/2006/main" xmlns:p="http://schemas.openxmlformats.org/presentationml/2006/main" xmlns:r="http://schemas.openxmlformats.org/officeDocument/2006/relationships">
   <p:cSld>
     <p:bg>

--- a/20_Projects/海音_心体の調律/タマラ/川越さん/20261014_セッション資料_エネルギーとチャクラ.pptx
+++ b/20_Projects/海音_心体の調律/タマラ/川越さん/20261014_セッション資料_エネルギーとチャクラ.pptx
@@ -5572,7 +5572,7 @@
         </p:nvSpPr>
         <p:spPr>
           <a:xfrm>
-            <a:off x="822960" y="1463040"/>
+            <a:off x="822960" y="1325880"/>
             <a:ext cx="731520" cy="731520"/>
           </a:xfrm>
           <a:prstGeom prst="roundRect">
@@ -5616,7 +5616,7 @@
         </p:nvSpPr>
         <p:spPr>
           <a:xfrm>
-            <a:off x="1828800" y="1463040"/>
+            <a:off x="1828800" y="1325880"/>
             <a:ext cx="9601200" cy="731520"/>
           </a:xfrm>
           <a:prstGeom prst="rect">
@@ -5655,7 +5655,7 @@
         </p:nvSpPr>
         <p:spPr>
           <a:xfrm>
-            <a:off x="822960" y="2514600"/>
+            <a:off x="822960" y="2221991"/>
             <a:ext cx="731520" cy="731520"/>
           </a:xfrm>
           <a:prstGeom prst="roundRect">
@@ -5699,7 +5699,7 @@
         </p:nvSpPr>
         <p:spPr>
           <a:xfrm>
-            <a:off x="1828800" y="2514600"/>
+            <a:off x="1828800" y="2221991"/>
             <a:ext cx="9601200" cy="731520"/>
           </a:xfrm>
           <a:prstGeom prst="rect">
@@ -5738,7 +5738,7 @@
         </p:nvSpPr>
         <p:spPr>
           <a:xfrm>
-            <a:off x="822960" y="3566160"/>
+            <a:off x="822960" y="3118104"/>
             <a:ext cx="731520" cy="731520"/>
           </a:xfrm>
           <a:prstGeom prst="roundRect">
@@ -5782,7 +5782,7 @@
         </p:nvSpPr>
         <p:spPr>
           <a:xfrm>
-            <a:off x="1828800" y="3566160"/>
+            <a:off x="1828800" y="3118104"/>
             <a:ext cx="9601200" cy="731520"/>
           </a:xfrm>
           <a:prstGeom prst="rect">
@@ -5821,7 +5821,7 @@
         </p:nvSpPr>
         <p:spPr>
           <a:xfrm>
-            <a:off x="822960" y="4617720"/>
+            <a:off x="822960" y="4014215"/>
             <a:ext cx="731520" cy="731520"/>
           </a:xfrm>
           <a:prstGeom prst="roundRect">
@@ -5865,7 +5865,7 @@
         </p:nvSpPr>
         <p:spPr>
           <a:xfrm>
-            <a:off x="1828800" y="4617720"/>
+            <a:off x="1828800" y="4014215"/>
             <a:ext cx="9601200" cy="731520"/>
           </a:xfrm>
           <a:prstGeom prst="rect">
@@ -5898,7 +5898,90 @@
       </p:sp>
       <p:sp>
         <p:nvSpPr>
-          <p:cNvPr id="11" name="TextBox 10"/>
+          <p:cNvPr id="11" name="Rounded Rectangle 10"/>
+          <p:cNvSpPr/>
+          <p:nvPr/>
+        </p:nvSpPr>
+        <p:spPr>
+          <a:xfrm>
+            <a:off x="822960" y="4910328"/>
+            <a:ext cx="731520" cy="731520"/>
+          </a:xfrm>
+          <a:prstGeom prst="roundRect">
+            <a:avLst/>
+          </a:prstGeom>
+          <a:solidFill>
+            <a:srgbClr val="FFFFFF"/>
+          </a:solidFill>
+          <a:ln>
+            <a:noFill/>
+          </a:ln>
+          <a:effectLst/>
+        </p:spPr>
+        <p:style>
+          <a:lnRef idx="1">
+            <a:schemeClr val="accent1"/>
+          </a:lnRef>
+          <a:fillRef idx="3">
+            <a:schemeClr val="accent1"/>
+          </a:fillRef>
+          <a:effectRef idx="2">
+            <a:schemeClr val="accent1"/>
+          </a:effectRef>
+          <a:fontRef idx="minor">
+            <a:schemeClr val="lt1"/>
+          </a:fontRef>
+        </p:style>
+        <p:txBody>
+          <a:bodyPr rtlCol="0" anchor="ctr"/>
+          <a:lstStyle/>
+          <a:p>
+            <a:pPr algn="ctr"/>
+          </a:p>
+        </p:txBody>
+      </p:sp>
+      <p:sp>
+        <p:nvSpPr>
+          <p:cNvPr id="12" name="TextBox 11"/>
+          <p:cNvSpPr txBox="1"/>
+          <p:nvPr/>
+        </p:nvSpPr>
+        <p:spPr>
+          <a:xfrm>
+            <a:off x="1828800" y="4910328"/>
+            <a:ext cx="9601200" cy="731520"/>
+          </a:xfrm>
+          <a:prstGeom prst="rect">
+            <a:avLst/>
+          </a:prstGeom>
+          <a:noFill/>
+        </p:spPr>
+        <p:txBody>
+          <a:bodyPr wrap="square" anchor="ctr" lIns="45720" rIns="45720">
+            <a:spAutoFit/>
+          </a:bodyPr>
+          <a:lstStyle/>
+          <a:p>
+            <a:pPr algn="l">
+              <a:spcAft>
+                <a:spcPts val="600"/>
+              </a:spcAft>
+            </a:pPr>
+            <a:r>
+              <a:rPr sz="2400" b="0">
+                <a:solidFill>
+                  <a:srgbClr val="FFFFFF"/>
+                </a:solidFill>
+                <a:latin typeface="Meiryo UI"/>
+              </a:rPr>
+              <a:t>飲んでいるお薬の一覧（お薬手帳など）の写真を送る</a:t>
+            </a:r>
+          </a:p>
+        </p:txBody>
+      </p:sp>
+      <p:sp>
+        <p:nvSpPr>
+          <p:cNvPr id="13" name="TextBox 12"/>
           <p:cNvSpPr txBox="1"/>
           <p:nvPr/>
         </p:nvSpPr>
